--- a/synvoric/assets/Synvoric-Capability-Deck.pptx
+++ b/synvoric/assets/Synvoric-Capability-Deck.pptx
@@ -5,20 +5,20 @@
     <p:sldMasterId id="2147483648" r:id="rId1"/>
   </p:sldMasterIdLst>
   <p:sldIdLst>
-    <p:sldId id="256" r:id="rId2"/>
-    <p:sldId id="257" r:id="rId3"/>
-    <p:sldId id="258" r:id="rId4"/>
-    <p:sldId id="259" r:id="rId5"/>
-    <p:sldId id="260" r:id="rId6"/>
-    <p:sldId id="261" r:id="rId7"/>
-    <p:sldId id="262" r:id="rId8"/>
-    <p:sldId id="263" r:id="rId9"/>
-    <p:sldId id="264" r:id="rId10"/>
-    <p:sldId id="265" r:id="rId11"/>
-    <p:sldId id="266" r:id="rId12"/>
-    <p:sldId id="267" r:id="rId13"/>
+    <p:sldId id="256" r:id="rId7"/>
+    <p:sldId id="257" r:id="rId8"/>
+    <p:sldId id="258" r:id="rId9"/>
+    <p:sldId id="259" r:id="rId10"/>
+    <p:sldId id="260" r:id="rId11"/>
+    <p:sldId id="261" r:id="rId12"/>
+    <p:sldId id="262" r:id="rId13"/>
+    <p:sldId id="263" r:id="rId14"/>
+    <p:sldId id="264" r:id="rId15"/>
+    <p:sldId id="265" r:id="rId16"/>
+    <p:sldId id="266" r:id="rId17"/>
+    <p:sldId id="267" r:id="rId18"/>
   </p:sldIdLst>
-  <p:sldSz cx="9144000" cy="5143500" type="screen16x9"/>
+  <p:sldSz cx="9144000" cy="5143500" type="screen4x3"/>
   <p:notesSz cx="6858000" cy="9144000"/>
   <p:defaultTextStyle>
     <a:defPPr>
@@ -115,22 +115,6 @@
       </a:defRPr>
     </a:lvl9pPr>
   </p:defaultTextStyle>
-  <p:extLst>
-    <p:ext uri="{EFAFB233-063F-42B5-8137-9DF3F51BA10A}">
-      <p15:sldGuideLst xmlns:p15="http://schemas.microsoft.com/office/powerpoint/2012/main">
-        <p15:guide id="1" orient="horz" pos="2160">
-          <p15:clr>
-            <a:srgbClr val="A4A3A4"/>
-          </p15:clr>
-        </p15:guide>
-        <p15:guide id="2" pos="2880">
-          <p15:clr>
-            <a:srgbClr val="A4A3A4"/>
-          </p15:clr>
-        </p15:guide>
-      </p15:sldGuideLst>
-    </p:ext>
-  </p:extLst>
 </p:presentation>
 </file>
 
@@ -172,9 +156,10 @@
           <a:lstStyle/>
           <a:p>
             <a:r>
-              <a:rPr lang="en-US"/>
+              <a:rPr lang="en-US" smtClean="0"/>
               <a:t>Click to edit Master title style</a:t>
             </a:r>
+            <a:endParaRPr lang="en-US"/>
           </a:p>
         </p:txBody>
       </p:sp>
@@ -290,9 +275,10 @@
           </a:lstStyle>
           <a:p>
             <a:r>
-              <a:rPr lang="en-US"/>
+              <a:rPr lang="en-US" smtClean="0"/>
               <a:t>Click to edit Master subtitle style</a:t>
             </a:r>
+            <a:endParaRPr lang="en-US"/>
           </a:p>
         </p:txBody>
       </p:sp>
@@ -313,7 +299,7 @@
           <a:p>
             <a:fld id="{5BCAD085-E8A6-8845-BD4E-CB4CCA059FC4}" type="datetimeFigureOut">
               <a:rPr lang="en-US" smtClean="0"/>
-              <a:t>5/25/26</a:t>
+              <a:t>1/27/13</a:t>
             </a:fld>
             <a:endParaRPr lang="en-US"/>
           </a:p>
@@ -407,9 +393,10 @@
           <a:lstStyle/>
           <a:p>
             <a:r>
-              <a:rPr lang="en-US"/>
+              <a:rPr lang="en-US" smtClean="0"/>
               <a:t>Click to edit Master title style</a:t>
             </a:r>
+            <a:endParaRPr lang="en-US"/>
           </a:p>
         </p:txBody>
       </p:sp>
@@ -430,37 +417,38 @@
           <a:p>
             <a:pPr lvl="0"/>
             <a:r>
-              <a:rPr lang="en-US"/>
+              <a:rPr lang="en-US" smtClean="0"/>
               <a:t>Click to edit Master text styles</a:t>
             </a:r>
           </a:p>
           <a:p>
             <a:pPr lvl="1"/>
             <a:r>
-              <a:rPr lang="en-US"/>
+              <a:rPr lang="en-US" smtClean="0"/>
               <a:t>Second level</a:t>
             </a:r>
           </a:p>
           <a:p>
             <a:pPr lvl="2"/>
             <a:r>
-              <a:rPr lang="en-US"/>
+              <a:rPr lang="en-US" smtClean="0"/>
               <a:t>Third level</a:t>
             </a:r>
           </a:p>
           <a:p>
             <a:pPr lvl="3"/>
             <a:r>
-              <a:rPr lang="en-US"/>
+              <a:rPr lang="en-US" smtClean="0"/>
               <a:t>Fourth level</a:t>
             </a:r>
           </a:p>
           <a:p>
             <a:pPr lvl="4"/>
             <a:r>
-              <a:rPr lang="en-US"/>
+              <a:rPr lang="en-US" smtClean="0"/>
               <a:t>Fifth level</a:t>
             </a:r>
+            <a:endParaRPr lang="en-US"/>
           </a:p>
         </p:txBody>
       </p:sp>
@@ -481,7 +469,7 @@
           <a:p>
             <a:fld id="{5BCAD085-E8A6-8845-BD4E-CB4CCA059FC4}" type="datetimeFigureOut">
               <a:rPr lang="en-US" smtClean="0"/>
-              <a:t>5/25/26</a:t>
+              <a:t>1/27/13</a:t>
             </a:fld>
             <a:endParaRPr lang="en-US"/>
           </a:p>
@@ -580,9 +568,10 @@
           <a:lstStyle/>
           <a:p>
             <a:r>
-              <a:rPr lang="en-US"/>
+              <a:rPr lang="en-US" smtClean="0"/>
               <a:t>Click to edit Master title style</a:t>
             </a:r>
+            <a:endParaRPr lang="en-US"/>
           </a:p>
         </p:txBody>
       </p:sp>
@@ -608,37 +597,38 @@
           <a:p>
             <a:pPr lvl="0"/>
             <a:r>
-              <a:rPr lang="en-US"/>
+              <a:rPr lang="en-US" smtClean="0"/>
               <a:t>Click to edit Master text styles</a:t>
             </a:r>
           </a:p>
           <a:p>
             <a:pPr lvl="1"/>
             <a:r>
-              <a:rPr lang="en-US"/>
+              <a:rPr lang="en-US" smtClean="0"/>
               <a:t>Second level</a:t>
             </a:r>
           </a:p>
           <a:p>
             <a:pPr lvl="2"/>
             <a:r>
-              <a:rPr lang="en-US"/>
+              <a:rPr lang="en-US" smtClean="0"/>
               <a:t>Third level</a:t>
             </a:r>
           </a:p>
           <a:p>
             <a:pPr lvl="3"/>
             <a:r>
-              <a:rPr lang="en-US"/>
+              <a:rPr lang="en-US" smtClean="0"/>
               <a:t>Fourth level</a:t>
             </a:r>
           </a:p>
           <a:p>
             <a:pPr lvl="4"/>
             <a:r>
-              <a:rPr lang="en-US"/>
+              <a:rPr lang="en-US" smtClean="0"/>
               <a:t>Fifth level</a:t>
             </a:r>
+            <a:endParaRPr lang="en-US"/>
           </a:p>
         </p:txBody>
       </p:sp>
@@ -659,7 +649,7 @@
           <a:p>
             <a:fld id="{5BCAD085-E8A6-8845-BD4E-CB4CCA059FC4}" type="datetimeFigureOut">
               <a:rPr lang="en-US" smtClean="0"/>
-              <a:t>5/25/26</a:t>
+              <a:t>1/27/13</a:t>
             </a:fld>
             <a:endParaRPr lang="en-US"/>
           </a:p>
@@ -753,9 +743,10 @@
           <a:lstStyle/>
           <a:p>
             <a:r>
-              <a:rPr lang="en-US"/>
+              <a:rPr lang="en-US" smtClean="0"/>
               <a:t>Click to edit Master title style</a:t>
             </a:r>
+            <a:endParaRPr lang="en-US"/>
           </a:p>
         </p:txBody>
       </p:sp>
@@ -776,37 +767,38 @@
           <a:p>
             <a:pPr lvl="0"/>
             <a:r>
-              <a:rPr lang="en-US"/>
+              <a:rPr lang="en-US" smtClean="0"/>
               <a:t>Click to edit Master text styles</a:t>
             </a:r>
           </a:p>
           <a:p>
             <a:pPr lvl="1"/>
             <a:r>
-              <a:rPr lang="en-US"/>
+              <a:rPr lang="en-US" smtClean="0"/>
               <a:t>Second level</a:t>
             </a:r>
           </a:p>
           <a:p>
             <a:pPr lvl="2"/>
             <a:r>
-              <a:rPr lang="en-US"/>
+              <a:rPr lang="en-US" smtClean="0"/>
               <a:t>Third level</a:t>
             </a:r>
           </a:p>
           <a:p>
             <a:pPr lvl="3"/>
             <a:r>
-              <a:rPr lang="en-US"/>
+              <a:rPr lang="en-US" smtClean="0"/>
               <a:t>Fourth level</a:t>
             </a:r>
           </a:p>
           <a:p>
             <a:pPr lvl="4"/>
             <a:r>
-              <a:rPr lang="en-US"/>
+              <a:rPr lang="en-US" smtClean="0"/>
               <a:t>Fifth level</a:t>
             </a:r>
+            <a:endParaRPr lang="en-US"/>
           </a:p>
         </p:txBody>
       </p:sp>
@@ -827,7 +819,7 @@
           <a:p>
             <a:fld id="{5BCAD085-E8A6-8845-BD4E-CB4CCA059FC4}" type="datetimeFigureOut">
               <a:rPr lang="en-US" smtClean="0"/>
-              <a:t>5/25/26</a:t>
+              <a:t>1/27/13</a:t>
             </a:fld>
             <a:endParaRPr lang="en-US"/>
           </a:p>
@@ -930,9 +922,10 @@
           </a:lstStyle>
           <a:p>
             <a:r>
-              <a:rPr lang="en-US"/>
+              <a:rPr lang="en-US" smtClean="0"/>
               <a:t>Click to edit Master title style</a:t>
             </a:r>
+            <a:endParaRPr lang="en-US"/>
           </a:p>
         </p:txBody>
       </p:sp>
@@ -1049,7 +1042,7 @@
           <a:p>
             <a:pPr lvl="0"/>
             <a:r>
-              <a:rPr lang="en-US"/>
+              <a:rPr lang="en-US" smtClean="0"/>
               <a:t>Click to edit Master text styles</a:t>
             </a:r>
           </a:p>
@@ -1072,7 +1065,7 @@
           <a:p>
             <a:fld id="{5BCAD085-E8A6-8845-BD4E-CB4CCA059FC4}" type="datetimeFigureOut">
               <a:rPr lang="en-US" smtClean="0"/>
-              <a:t>5/25/26</a:t>
+              <a:t>1/27/13</a:t>
             </a:fld>
             <a:endParaRPr lang="en-US"/>
           </a:p>
@@ -1166,9 +1159,10 @@
           <a:lstStyle/>
           <a:p>
             <a:r>
-              <a:rPr lang="en-US"/>
+              <a:rPr lang="en-US" smtClean="0"/>
               <a:t>Click to edit Master title style</a:t>
             </a:r>
+            <a:endParaRPr lang="en-US"/>
           </a:p>
         </p:txBody>
       </p:sp>
@@ -1222,37 +1216,38 @@
           <a:p>
             <a:pPr lvl="0"/>
             <a:r>
-              <a:rPr lang="en-US"/>
+              <a:rPr lang="en-US" smtClean="0"/>
               <a:t>Click to edit Master text styles</a:t>
             </a:r>
           </a:p>
           <a:p>
             <a:pPr lvl="1"/>
             <a:r>
-              <a:rPr lang="en-US"/>
+              <a:rPr lang="en-US" smtClean="0"/>
               <a:t>Second level</a:t>
             </a:r>
           </a:p>
           <a:p>
             <a:pPr lvl="2"/>
             <a:r>
-              <a:rPr lang="en-US"/>
+              <a:rPr lang="en-US" smtClean="0"/>
               <a:t>Third level</a:t>
             </a:r>
           </a:p>
           <a:p>
             <a:pPr lvl="3"/>
             <a:r>
-              <a:rPr lang="en-US"/>
+              <a:rPr lang="en-US" smtClean="0"/>
               <a:t>Fourth level</a:t>
             </a:r>
           </a:p>
           <a:p>
             <a:pPr lvl="4"/>
             <a:r>
-              <a:rPr lang="en-US"/>
+              <a:rPr lang="en-US" smtClean="0"/>
               <a:t>Fifth level</a:t>
             </a:r>
+            <a:endParaRPr lang="en-US"/>
           </a:p>
         </p:txBody>
       </p:sp>
@@ -1306,37 +1301,38 @@
           <a:p>
             <a:pPr lvl="0"/>
             <a:r>
-              <a:rPr lang="en-US"/>
+              <a:rPr lang="en-US" smtClean="0"/>
               <a:t>Click to edit Master text styles</a:t>
             </a:r>
           </a:p>
           <a:p>
             <a:pPr lvl="1"/>
             <a:r>
-              <a:rPr lang="en-US"/>
+              <a:rPr lang="en-US" smtClean="0"/>
               <a:t>Second level</a:t>
             </a:r>
           </a:p>
           <a:p>
             <a:pPr lvl="2"/>
             <a:r>
-              <a:rPr lang="en-US"/>
+              <a:rPr lang="en-US" smtClean="0"/>
               <a:t>Third level</a:t>
             </a:r>
           </a:p>
           <a:p>
             <a:pPr lvl="3"/>
             <a:r>
-              <a:rPr lang="en-US"/>
+              <a:rPr lang="en-US" smtClean="0"/>
               <a:t>Fourth level</a:t>
             </a:r>
           </a:p>
           <a:p>
             <a:pPr lvl="4"/>
             <a:r>
-              <a:rPr lang="en-US"/>
+              <a:rPr lang="en-US" smtClean="0"/>
               <a:t>Fifth level</a:t>
             </a:r>
+            <a:endParaRPr lang="en-US"/>
           </a:p>
         </p:txBody>
       </p:sp>
@@ -1357,7 +1353,7 @@
           <a:p>
             <a:fld id="{5BCAD085-E8A6-8845-BD4E-CB4CCA059FC4}" type="datetimeFigureOut">
               <a:rPr lang="en-US" smtClean="0"/>
-              <a:t>5/25/26</a:t>
+              <a:t>1/27/13</a:t>
             </a:fld>
             <a:endParaRPr lang="en-US"/>
           </a:p>
@@ -1455,9 +1451,10 @@
           </a:lstStyle>
           <a:p>
             <a:r>
-              <a:rPr lang="en-US"/>
+              <a:rPr lang="en-US" smtClean="0"/>
               <a:t>Click to edit Master title style</a:t>
             </a:r>
+            <a:endParaRPr lang="en-US"/>
           </a:p>
         </p:txBody>
       </p:sp>
@@ -1520,7 +1517,7 @@
           <a:p>
             <a:pPr lvl="0"/>
             <a:r>
-              <a:rPr lang="en-US"/>
+              <a:rPr lang="en-US" smtClean="0"/>
               <a:t>Click to edit Master text styles</a:t>
             </a:r>
           </a:p>
@@ -1576,37 +1573,38 @@
           <a:p>
             <a:pPr lvl="0"/>
             <a:r>
-              <a:rPr lang="en-US"/>
+              <a:rPr lang="en-US" smtClean="0"/>
               <a:t>Click to edit Master text styles</a:t>
             </a:r>
           </a:p>
           <a:p>
             <a:pPr lvl="1"/>
             <a:r>
-              <a:rPr lang="en-US"/>
+              <a:rPr lang="en-US" smtClean="0"/>
               <a:t>Second level</a:t>
             </a:r>
           </a:p>
           <a:p>
             <a:pPr lvl="2"/>
             <a:r>
-              <a:rPr lang="en-US"/>
+              <a:rPr lang="en-US" smtClean="0"/>
               <a:t>Third level</a:t>
             </a:r>
           </a:p>
           <a:p>
             <a:pPr lvl="3"/>
             <a:r>
-              <a:rPr lang="en-US"/>
+              <a:rPr lang="en-US" smtClean="0"/>
               <a:t>Fourth level</a:t>
             </a:r>
           </a:p>
           <a:p>
             <a:pPr lvl="4"/>
             <a:r>
-              <a:rPr lang="en-US"/>
+              <a:rPr lang="en-US" smtClean="0"/>
               <a:t>Fifth level</a:t>
             </a:r>
+            <a:endParaRPr lang="en-US"/>
           </a:p>
         </p:txBody>
       </p:sp>
@@ -1669,7 +1667,7 @@
           <a:p>
             <a:pPr lvl="0"/>
             <a:r>
-              <a:rPr lang="en-US"/>
+              <a:rPr lang="en-US" smtClean="0"/>
               <a:t>Click to edit Master text styles</a:t>
             </a:r>
           </a:p>
@@ -1725,37 +1723,38 @@
           <a:p>
             <a:pPr lvl="0"/>
             <a:r>
-              <a:rPr lang="en-US"/>
+              <a:rPr lang="en-US" smtClean="0"/>
               <a:t>Click to edit Master text styles</a:t>
             </a:r>
           </a:p>
           <a:p>
             <a:pPr lvl="1"/>
             <a:r>
-              <a:rPr lang="en-US"/>
+              <a:rPr lang="en-US" smtClean="0"/>
               <a:t>Second level</a:t>
             </a:r>
           </a:p>
           <a:p>
             <a:pPr lvl="2"/>
             <a:r>
-              <a:rPr lang="en-US"/>
+              <a:rPr lang="en-US" smtClean="0"/>
               <a:t>Third level</a:t>
             </a:r>
           </a:p>
           <a:p>
             <a:pPr lvl="3"/>
             <a:r>
-              <a:rPr lang="en-US"/>
+              <a:rPr lang="en-US" smtClean="0"/>
               <a:t>Fourth level</a:t>
             </a:r>
           </a:p>
           <a:p>
             <a:pPr lvl="4"/>
             <a:r>
-              <a:rPr lang="en-US"/>
+              <a:rPr lang="en-US" smtClean="0"/>
               <a:t>Fifth level</a:t>
             </a:r>
+            <a:endParaRPr lang="en-US"/>
           </a:p>
         </p:txBody>
       </p:sp>
@@ -1776,7 +1775,7 @@
           <a:p>
             <a:fld id="{5BCAD085-E8A6-8845-BD4E-CB4CCA059FC4}" type="datetimeFigureOut">
               <a:rPr lang="en-US" smtClean="0"/>
-              <a:t>5/25/26</a:t>
+              <a:t>1/27/13</a:t>
             </a:fld>
             <a:endParaRPr lang="en-US"/>
           </a:p>
@@ -1870,9 +1869,10 @@
           <a:lstStyle/>
           <a:p>
             <a:r>
-              <a:rPr lang="en-US"/>
+              <a:rPr lang="en-US" smtClean="0"/>
               <a:t>Click to edit Master title style</a:t>
             </a:r>
+            <a:endParaRPr lang="en-US"/>
           </a:p>
         </p:txBody>
       </p:sp>
@@ -1893,7 +1893,7 @@
           <a:p>
             <a:fld id="{5BCAD085-E8A6-8845-BD4E-CB4CCA059FC4}" type="datetimeFigureOut">
               <a:rPr lang="en-US" smtClean="0"/>
-              <a:t>5/25/26</a:t>
+              <a:t>1/27/13</a:t>
             </a:fld>
             <a:endParaRPr lang="en-US"/>
           </a:p>
@@ -1988,7 +1988,7 @@
           <a:p>
             <a:fld id="{5BCAD085-E8A6-8845-BD4E-CB4CCA059FC4}" type="datetimeFigureOut">
               <a:rPr lang="en-US" smtClean="0"/>
-              <a:t>5/25/26</a:t>
+              <a:t>1/27/13</a:t>
             </a:fld>
             <a:endParaRPr lang="en-US"/>
           </a:p>
@@ -2091,9 +2091,10 @@
           </a:lstStyle>
           <a:p>
             <a:r>
-              <a:rPr lang="en-US"/>
+              <a:rPr lang="en-US" smtClean="0"/>
               <a:t>Click to edit Master title style</a:t>
             </a:r>
+            <a:endParaRPr lang="en-US"/>
           </a:p>
         </p:txBody>
       </p:sp>
@@ -2147,37 +2148,38 @@
           <a:p>
             <a:pPr lvl="0"/>
             <a:r>
-              <a:rPr lang="en-US"/>
+              <a:rPr lang="en-US" smtClean="0"/>
               <a:t>Click to edit Master text styles</a:t>
             </a:r>
           </a:p>
           <a:p>
             <a:pPr lvl="1"/>
             <a:r>
-              <a:rPr lang="en-US"/>
+              <a:rPr lang="en-US" smtClean="0"/>
               <a:t>Second level</a:t>
             </a:r>
           </a:p>
           <a:p>
             <a:pPr lvl="2"/>
             <a:r>
-              <a:rPr lang="en-US"/>
+              <a:rPr lang="en-US" smtClean="0"/>
               <a:t>Third level</a:t>
             </a:r>
           </a:p>
           <a:p>
             <a:pPr lvl="3"/>
             <a:r>
-              <a:rPr lang="en-US"/>
+              <a:rPr lang="en-US" smtClean="0"/>
               <a:t>Fourth level</a:t>
             </a:r>
           </a:p>
           <a:p>
             <a:pPr lvl="4"/>
             <a:r>
-              <a:rPr lang="en-US"/>
+              <a:rPr lang="en-US" smtClean="0"/>
               <a:t>Fifth level</a:t>
             </a:r>
+            <a:endParaRPr lang="en-US"/>
           </a:p>
         </p:txBody>
       </p:sp>
@@ -2240,7 +2242,7 @@
           <a:p>
             <a:pPr lvl="0"/>
             <a:r>
-              <a:rPr lang="en-US"/>
+              <a:rPr lang="en-US" smtClean="0"/>
               <a:t>Click to edit Master text styles</a:t>
             </a:r>
           </a:p>
@@ -2263,7 +2265,7 @@
           <a:p>
             <a:fld id="{5BCAD085-E8A6-8845-BD4E-CB4CCA059FC4}" type="datetimeFigureOut">
               <a:rPr lang="en-US" smtClean="0"/>
-              <a:t>5/25/26</a:t>
+              <a:t>1/27/13</a:t>
             </a:fld>
             <a:endParaRPr lang="en-US"/>
           </a:p>
@@ -2366,9 +2368,10 @@
           </a:lstStyle>
           <a:p>
             <a:r>
-              <a:rPr lang="en-US"/>
+              <a:rPr lang="en-US" smtClean="0"/>
               <a:t>Click to edit Master title style</a:t>
             </a:r>
+            <a:endParaRPr lang="en-US"/>
           </a:p>
         </p:txBody>
       </p:sp>
@@ -2492,7 +2495,7 @@
           <a:p>
             <a:pPr lvl="0"/>
             <a:r>
-              <a:rPr lang="en-US"/>
+              <a:rPr lang="en-US" smtClean="0"/>
               <a:t>Click to edit Master text styles</a:t>
             </a:r>
           </a:p>
@@ -2515,7 +2518,7 @@
           <a:p>
             <a:fld id="{5BCAD085-E8A6-8845-BD4E-CB4CCA059FC4}" type="datetimeFigureOut">
               <a:rPr lang="en-US" smtClean="0"/>
-              <a:t>5/25/26</a:t>
+              <a:t>1/27/13</a:t>
             </a:fld>
             <a:endParaRPr lang="en-US"/>
           </a:p>
@@ -2624,9 +2627,10 @@
           <a:lstStyle/>
           <a:p>
             <a:r>
-              <a:rPr lang="en-US"/>
+              <a:rPr lang="en-US" smtClean="0"/>
               <a:t>Click to edit Master title style</a:t>
             </a:r>
+            <a:endParaRPr lang="en-US"/>
           </a:p>
         </p:txBody>
       </p:sp>
@@ -2657,37 +2661,38 @@
           <a:p>
             <a:pPr lvl="0"/>
             <a:r>
-              <a:rPr lang="en-US"/>
+              <a:rPr lang="en-US" smtClean="0"/>
               <a:t>Click to edit Master text styles</a:t>
             </a:r>
           </a:p>
           <a:p>
             <a:pPr lvl="1"/>
             <a:r>
-              <a:rPr lang="en-US"/>
+              <a:rPr lang="en-US" smtClean="0"/>
               <a:t>Second level</a:t>
             </a:r>
           </a:p>
           <a:p>
             <a:pPr lvl="2"/>
             <a:r>
-              <a:rPr lang="en-US"/>
+              <a:rPr lang="en-US" smtClean="0"/>
               <a:t>Third level</a:t>
             </a:r>
           </a:p>
           <a:p>
             <a:pPr lvl="3"/>
             <a:r>
-              <a:rPr lang="en-US"/>
+              <a:rPr lang="en-US" smtClean="0"/>
               <a:t>Fourth level</a:t>
             </a:r>
           </a:p>
           <a:p>
             <a:pPr lvl="4"/>
             <a:r>
-              <a:rPr lang="en-US"/>
+              <a:rPr lang="en-US" smtClean="0"/>
               <a:t>Fifth level</a:t>
             </a:r>
+            <a:endParaRPr lang="en-US"/>
           </a:p>
         </p:txBody>
       </p:sp>
@@ -2726,7 +2731,7 @@
           <a:p>
             <a:fld id="{5BCAD085-E8A6-8845-BD4E-CB4CCA059FC4}" type="datetimeFigureOut">
               <a:rPr lang="en-US" smtClean="0"/>
-              <a:t>5/25/26</a:t>
+              <a:t>1/27/13</a:t>
             </a:fld>
             <a:endParaRPr lang="en-US"/>
           </a:p>
@@ -3085,7 +3090,7 @@
 </file>
 
 <file path=ppt/slides/slide1.xml><?xml version="1.0" encoding="utf-8"?>
-<p:sld xmlns:a="http://schemas.openxmlformats.org/drawingml/2006/main" xmlns:r="http://schemas.openxmlformats.org/officeDocument/2006/relationships" xmlns:p="http://schemas.openxmlformats.org/presentationml/2006/main">
+<p:sld xmlns:a="http://schemas.openxmlformats.org/drawingml/2006/main" xmlns:p="http://schemas.openxmlformats.org/presentationml/2006/main" xmlns:r="http://schemas.openxmlformats.org/officeDocument/2006/relationships">
   <p:cSld>
     <p:bg>
       <p:bgPr>
@@ -3101,14 +3106,7 @@
         <p:cNvGrpSpPr/>
         <p:nvPr/>
       </p:nvGrpSpPr>
-      <p:grpSpPr>
-        <a:xfrm>
-          <a:off x="0" y="0"/>
-          <a:ext cx="0" cy="0"/>
-          <a:chOff x="0" y="0"/>
-          <a:chExt cx="0" cy="0"/>
-        </a:xfrm>
-      </p:grpSpPr>
+      <p:grpSpPr/>
       <p:pic>
         <p:nvPicPr>
           <p:cNvPr id="2" name="Picture 1" descr="logo.png"/>
@@ -3278,7 +3276,6 @@
           <a:lstStyle/>
           <a:p>
             <a:pPr algn="ctr"/>
-            <a:endParaRPr/>
           </a:p>
         </p:txBody>
       </p:sp>
@@ -3361,7 +3358,7 @@
 </file>
 
 <file path=ppt/slides/slide10.xml><?xml version="1.0" encoding="utf-8"?>
-<p:sld xmlns:a="http://schemas.openxmlformats.org/drawingml/2006/main" xmlns:r="http://schemas.openxmlformats.org/officeDocument/2006/relationships" xmlns:p="http://schemas.openxmlformats.org/presentationml/2006/main">
+<p:sld xmlns:a="http://schemas.openxmlformats.org/drawingml/2006/main" xmlns:p="http://schemas.openxmlformats.org/presentationml/2006/main" xmlns:r="http://schemas.openxmlformats.org/officeDocument/2006/relationships">
   <p:cSld>
     <p:spTree>
       <p:nvGrpSpPr>
@@ -3369,14 +3366,7 @@
         <p:cNvGrpSpPr/>
         <p:nvPr/>
       </p:nvGrpSpPr>
-      <p:grpSpPr>
-        <a:xfrm>
-          <a:off x="0" y="0"/>
-          <a:ext cx="0" cy="0"/>
-          <a:chOff x="0" y="0"/>
-          <a:chExt cx="0" cy="0"/>
-        </a:xfrm>
-      </p:grpSpPr>
+      <p:grpSpPr/>
       <p:sp>
         <p:nvSpPr>
           <p:cNvPr id="2" name="TextBox 1"/>
@@ -3489,7 +3479,6 @@
           <a:lstStyle/>
           <a:p>
             <a:pPr algn="ctr"/>
-            <a:endParaRPr/>
           </a:p>
         </p:txBody>
       </p:sp>
@@ -3533,7 +3522,6 @@
           <a:lstStyle/>
           <a:p>
             <a:pPr algn="ctr"/>
-            <a:endParaRPr/>
           </a:p>
         </p:txBody>
       </p:sp>
@@ -3560,7 +3548,7 @@
           <a:lstStyle/>
           <a:p>
             <a:pPr>
-              <a:defRPr sz="1200" b="1">
+              <a:defRPr b="1" sz="1200">
                 <a:solidFill>
                   <a:srgbClr val="051C2C"/>
                 </a:solidFill>
@@ -3624,7 +3612,6 @@
           <a:lstStyle/>
           <a:p>
             <a:pPr algn="ctr"/>
-            <a:endParaRPr/>
           </a:p>
         </p:txBody>
       </p:sp>
@@ -3651,7 +3638,7 @@
           <a:lstStyle/>
           <a:p>
             <a:pPr>
-              <a:defRPr sz="1200" b="1">
+              <a:defRPr b="1" sz="1200">
                 <a:solidFill>
                   <a:srgbClr val="051C2C"/>
                 </a:solidFill>
@@ -3715,7 +3702,6 @@
           <a:lstStyle/>
           <a:p>
             <a:pPr algn="ctr"/>
-            <a:endParaRPr/>
           </a:p>
         </p:txBody>
       </p:sp>
@@ -3742,7 +3728,7 @@
           <a:lstStyle/>
           <a:p>
             <a:pPr>
-              <a:defRPr sz="1200" b="1">
+              <a:defRPr b="1" sz="1200">
                 <a:solidFill>
                   <a:srgbClr val="051C2C"/>
                 </a:solidFill>
@@ -3806,7 +3792,6 @@
           <a:lstStyle/>
           <a:p>
             <a:pPr algn="ctr"/>
-            <a:endParaRPr/>
           </a:p>
         </p:txBody>
       </p:sp>
@@ -3833,7 +3818,7 @@
           <a:lstStyle/>
           <a:p>
             <a:pPr>
-              <a:defRPr sz="1200" b="1">
+              <a:defRPr b="1" sz="1200">
                 <a:solidFill>
                   <a:srgbClr val="051C2C"/>
                 </a:solidFill>
@@ -3897,7 +3882,6 @@
           <a:lstStyle/>
           <a:p>
             <a:pPr algn="ctr"/>
-            <a:endParaRPr/>
           </a:p>
         </p:txBody>
       </p:sp>
@@ -3980,7 +3964,7 @@
 </file>
 
 <file path=ppt/slides/slide11.xml><?xml version="1.0" encoding="utf-8"?>
-<p:sld xmlns:a="http://schemas.openxmlformats.org/drawingml/2006/main" xmlns:r="http://schemas.openxmlformats.org/officeDocument/2006/relationships" xmlns:p="http://schemas.openxmlformats.org/presentationml/2006/main">
+<p:sld xmlns:a="http://schemas.openxmlformats.org/drawingml/2006/main" xmlns:p="http://schemas.openxmlformats.org/presentationml/2006/main" xmlns:r="http://schemas.openxmlformats.org/officeDocument/2006/relationships">
   <p:cSld>
     <p:spTree>
       <p:nvGrpSpPr>
@@ -3988,14 +3972,7 @@
         <p:cNvGrpSpPr/>
         <p:nvPr/>
       </p:nvGrpSpPr>
-      <p:grpSpPr>
-        <a:xfrm>
-          <a:off x="0" y="0"/>
-          <a:ext cx="0" cy="0"/>
-          <a:chOff x="0" y="0"/>
-          <a:chExt cx="0" cy="0"/>
-        </a:xfrm>
-      </p:grpSpPr>
+      <p:grpSpPr/>
       <p:sp>
         <p:nvSpPr>
           <p:cNvPr id="2" name="TextBox 1"/>
@@ -4108,7 +4085,6 @@
           <a:lstStyle/>
           <a:p>
             <a:pPr algn="ctr"/>
-            <a:endParaRPr/>
           </a:p>
         </p:txBody>
       </p:sp>
@@ -4387,7 +4363,6 @@
           <a:lstStyle/>
           <a:p>
             <a:pPr algn="ctr"/>
-            <a:endParaRPr/>
           </a:p>
         </p:txBody>
       </p:sp>
@@ -4470,7 +4445,7 @@
 </file>
 
 <file path=ppt/slides/slide12.xml><?xml version="1.0" encoding="utf-8"?>
-<p:sld xmlns:a="http://schemas.openxmlformats.org/drawingml/2006/main" xmlns:r="http://schemas.openxmlformats.org/officeDocument/2006/relationships" xmlns:p="http://schemas.openxmlformats.org/presentationml/2006/main">
+<p:sld xmlns:a="http://schemas.openxmlformats.org/drawingml/2006/main" xmlns:p="http://schemas.openxmlformats.org/presentationml/2006/main" xmlns:r="http://schemas.openxmlformats.org/officeDocument/2006/relationships">
   <p:cSld>
     <p:spTree>
       <p:nvGrpSpPr>
@@ -4478,14 +4453,7 @@
         <p:cNvGrpSpPr/>
         <p:nvPr/>
       </p:nvGrpSpPr>
-      <p:grpSpPr>
-        <a:xfrm>
-          <a:off x="0" y="0"/>
-          <a:ext cx="0" cy="0"/>
-          <a:chOff x="0" y="0"/>
-          <a:chExt cx="0" cy="0"/>
-        </a:xfrm>
-      </p:grpSpPr>
+      <p:grpSpPr/>
       <p:sp>
         <p:nvSpPr>
           <p:cNvPr id="2" name="TextBox 1"/>
@@ -4598,7 +4566,6 @@
           <a:lstStyle/>
           <a:p>
             <a:pPr algn="ctr"/>
-            <a:endParaRPr/>
           </a:p>
         </p:txBody>
       </p:sp>
@@ -4632,7 +4599,7 @@
               </a:defRPr>
             </a:pPr>
             <a:r>
-              <a:t>palak.agrawal@synvoric.com</a:t>
+              <a:t>anshul.agrawal@synvoric.com</a:t>
             </a:r>
           </a:p>
           <a:p>
@@ -4649,6 +4616,13 @@
           </a:p>
           <a:p>
             <a:br/>
+            <a:pPr algn="ctr">
+              <a:defRPr sz="1100">
+                <a:solidFill>
+                  <a:srgbClr val="334155"/>
+                </a:solidFill>
+              </a:defRPr>
+            </a:pPr>
             <a:r>
               <a:t>Staff Augmentation  ·  Dedicated Teams  ·  Project Delivery</a:t>
             </a:r>
@@ -4695,7 +4669,6 @@
           <a:lstStyle/>
           <a:p>
             <a:pPr algn="ctr"/>
-            <a:endParaRPr/>
           </a:p>
         </p:txBody>
       </p:sp>
@@ -4778,7 +4751,7 @@
 </file>
 
 <file path=ppt/slides/slide2.xml><?xml version="1.0" encoding="utf-8"?>
-<p:sld xmlns:a="http://schemas.openxmlformats.org/drawingml/2006/main" xmlns:r="http://schemas.openxmlformats.org/officeDocument/2006/relationships" xmlns:p="http://schemas.openxmlformats.org/presentationml/2006/main">
+<p:sld xmlns:a="http://schemas.openxmlformats.org/drawingml/2006/main" xmlns:p="http://schemas.openxmlformats.org/presentationml/2006/main" xmlns:r="http://schemas.openxmlformats.org/officeDocument/2006/relationships">
   <p:cSld>
     <p:spTree>
       <p:nvGrpSpPr>
@@ -4786,14 +4759,7 @@
         <p:cNvGrpSpPr/>
         <p:nvPr/>
       </p:nvGrpSpPr>
-      <p:grpSpPr>
-        <a:xfrm>
-          <a:off x="0" y="0"/>
-          <a:ext cx="0" cy="0"/>
-          <a:chOff x="0" y="0"/>
-          <a:chExt cx="0" cy="0"/>
-        </a:xfrm>
-      </p:grpSpPr>
+      <p:grpSpPr/>
       <p:sp>
         <p:nvSpPr>
           <p:cNvPr id="2" name="TextBox 1"/>
@@ -4906,7 +4872,6 @@
           <a:lstStyle/>
           <a:p>
             <a:pPr algn="ctr"/>
-            <a:endParaRPr/>
           </a:p>
         </p:txBody>
       </p:sp>
@@ -4941,20 +4906,19 @@
               </a:defRPr>
             </a:pPr>
             <a:r>
-              <a:rPr dirty="0" err="1"/>
-              <a:t>Synvoric</a:t>
-            </a:r>
-            <a:r>
-              <a:rPr dirty="0"/>
-              <a:t> is a professional IT staffing company specializing in frontend developers and AI/ML engineers. We partner with enterprises and growth-stage companies to deliver vetted engineering talent for web applications, mobile apps, and AI-powered products.</a:t>
-            </a:r>
-          </a:p>
-          <a:p>
-            <a:br>
-              <a:rPr dirty="0"/>
-            </a:br>
-            <a:r>
-              <a:rPr dirty="0"/>
+              <a:t>Synvoric is a professional IT staffing company specializing in frontend developers and AI/ML engineers. We partner with enterprises and growth-stage companies to deliver vetted engineering talent for web applications, mobile apps, and AI-powered products.</a:t>
+            </a:r>
+          </a:p>
+          <a:p>
+            <a:br/>
+            <a:pPr>
+              <a:defRPr sz="1200">
+                <a:solidFill>
+                  <a:srgbClr val="334155"/>
+                </a:solidFill>
+              </a:defRPr>
+            </a:pPr>
+            <a:r>
               <a:t>Founded on the belief that great software starts with great people, we combine rigorous technical vetting with a partnership-first approach.</a:t>
             </a:r>
           </a:p>
@@ -5264,7 +5228,6 @@
           <a:lstStyle/>
           <a:p>
             <a:pPr algn="ctr"/>
-            <a:endParaRPr/>
           </a:p>
         </p:txBody>
       </p:sp>
@@ -5347,7 +5310,7 @@
 </file>
 
 <file path=ppt/slides/slide3.xml><?xml version="1.0" encoding="utf-8"?>
-<p:sld xmlns:a="http://schemas.openxmlformats.org/drawingml/2006/main" xmlns:r="http://schemas.openxmlformats.org/officeDocument/2006/relationships" xmlns:p="http://schemas.openxmlformats.org/presentationml/2006/main">
+<p:sld xmlns:a="http://schemas.openxmlformats.org/drawingml/2006/main" xmlns:p="http://schemas.openxmlformats.org/presentationml/2006/main" xmlns:r="http://schemas.openxmlformats.org/officeDocument/2006/relationships">
   <p:cSld>
     <p:bg>
       <p:bgPr>
@@ -5363,14 +5326,7 @@
         <p:cNvGrpSpPr/>
         <p:nvPr/>
       </p:nvGrpSpPr>
-      <p:grpSpPr>
-        <a:xfrm>
-          <a:off x="0" y="0"/>
-          <a:ext cx="0" cy="0"/>
-          <a:chOff x="0" y="0"/>
-          <a:chExt cx="0" cy="0"/>
-        </a:xfrm>
-      </p:grpSpPr>
+      <p:grpSpPr/>
       <p:sp>
         <p:nvSpPr>
           <p:cNvPr id="2" name="TextBox 1"/>
@@ -5484,7 +5440,6 @@
           <a:lstStyle/>
           <a:p>
             <a:pPr algn="ctr"/>
-            <a:endParaRPr/>
           </a:p>
         </p:txBody>
       </p:sp>
@@ -5567,7 +5522,7 @@
 </file>
 
 <file path=ppt/slides/slide4.xml><?xml version="1.0" encoding="utf-8"?>
-<p:sld xmlns:a="http://schemas.openxmlformats.org/drawingml/2006/main" xmlns:r="http://schemas.openxmlformats.org/officeDocument/2006/relationships" xmlns:p="http://schemas.openxmlformats.org/presentationml/2006/main">
+<p:sld xmlns:a="http://schemas.openxmlformats.org/drawingml/2006/main" xmlns:p="http://schemas.openxmlformats.org/presentationml/2006/main" xmlns:r="http://schemas.openxmlformats.org/officeDocument/2006/relationships">
   <p:cSld>
     <p:spTree>
       <p:nvGrpSpPr>
@@ -5575,14 +5530,7 @@
         <p:cNvGrpSpPr/>
         <p:nvPr/>
       </p:nvGrpSpPr>
-      <p:grpSpPr>
-        <a:xfrm>
-          <a:off x="0" y="0"/>
-          <a:ext cx="0" cy="0"/>
-          <a:chOff x="0" y="0"/>
-          <a:chExt cx="0" cy="0"/>
-        </a:xfrm>
-      </p:grpSpPr>
+      <p:grpSpPr/>
       <p:sp>
         <p:nvSpPr>
           <p:cNvPr id="2" name="TextBox 1"/>
@@ -5695,7 +5643,6 @@
           <a:lstStyle/>
           <a:p>
             <a:pPr algn="ctr"/>
-            <a:endParaRPr/>
           </a:p>
         </p:txBody>
       </p:sp>
@@ -5737,7 +5684,7 @@
           </a:fontRef>
         </p:style>
         <p:txBody>
-          <a:bodyPr wrap="square" lIns="109728" tIns="109728" rtlCol="0" anchor="ctr"/>
+          <a:bodyPr rtlCol="0" anchor="ctr" lIns="109728" tIns="109728" wrap="square"/>
           <a:lstStyle/>
           <a:p>
             <a:pPr algn="ctr">
@@ -5805,7 +5752,6 @@
           <a:lstStyle/>
           <a:p>
             <a:pPr algn="ctr"/>
-            <a:endParaRPr/>
           </a:p>
         </p:txBody>
       </p:sp>
@@ -5847,7 +5793,7 @@
           </a:fontRef>
         </p:style>
         <p:txBody>
-          <a:bodyPr wrap="square" lIns="109728" tIns="109728" rtlCol="0" anchor="ctr"/>
+          <a:bodyPr rtlCol="0" anchor="ctr" lIns="109728" tIns="109728" wrap="square"/>
           <a:lstStyle/>
           <a:p>
             <a:pPr algn="ctr">
@@ -5915,7 +5861,6 @@
           <a:lstStyle/>
           <a:p>
             <a:pPr algn="ctr"/>
-            <a:endParaRPr/>
           </a:p>
         </p:txBody>
       </p:sp>
@@ -5957,7 +5902,7 @@
           </a:fontRef>
         </p:style>
         <p:txBody>
-          <a:bodyPr wrap="square" lIns="109728" tIns="109728" rtlCol="0" anchor="ctr"/>
+          <a:bodyPr rtlCol="0" anchor="ctr" lIns="109728" tIns="109728" wrap="square"/>
           <a:lstStyle/>
           <a:p>
             <a:pPr algn="ctr">
@@ -6025,7 +5970,6 @@
           <a:lstStyle/>
           <a:p>
             <a:pPr algn="ctr"/>
-            <a:endParaRPr/>
           </a:p>
         </p:txBody>
       </p:sp>
@@ -6067,7 +6011,7 @@
           </a:fontRef>
         </p:style>
         <p:txBody>
-          <a:bodyPr wrap="square" lIns="109728" tIns="109728" rtlCol="0" anchor="ctr"/>
+          <a:bodyPr rtlCol="0" anchor="ctr" lIns="109728" tIns="109728" wrap="square"/>
           <a:lstStyle/>
           <a:p>
             <a:pPr algn="ctr">
@@ -6135,7 +6079,6 @@
           <a:lstStyle/>
           <a:p>
             <a:pPr algn="ctr"/>
-            <a:endParaRPr/>
           </a:p>
         </p:txBody>
       </p:sp>
@@ -6177,7 +6120,7 @@
           </a:fontRef>
         </p:style>
         <p:txBody>
-          <a:bodyPr wrap="square" lIns="109728" tIns="109728" rtlCol="0" anchor="ctr"/>
+          <a:bodyPr rtlCol="0" anchor="ctr" lIns="109728" tIns="109728" wrap="square"/>
           <a:lstStyle/>
           <a:p>
             <a:pPr algn="ctr">
@@ -6245,7 +6188,6 @@
           <a:lstStyle/>
           <a:p>
             <a:pPr algn="ctr"/>
-            <a:endParaRPr/>
           </a:p>
         </p:txBody>
       </p:sp>
@@ -6287,7 +6229,7 @@
           </a:fontRef>
         </p:style>
         <p:txBody>
-          <a:bodyPr wrap="square" lIns="109728" tIns="109728" rtlCol="0" anchor="ctr"/>
+          <a:bodyPr rtlCol="0" anchor="ctr" lIns="109728" tIns="109728" wrap="square"/>
           <a:lstStyle/>
           <a:p>
             <a:pPr algn="ctr">
@@ -6355,7 +6297,6 @@
           <a:lstStyle/>
           <a:p>
             <a:pPr algn="ctr"/>
-            <a:endParaRPr/>
           </a:p>
         </p:txBody>
       </p:sp>
@@ -6399,7 +6340,6 @@
           <a:lstStyle/>
           <a:p>
             <a:pPr algn="ctr"/>
-            <a:endParaRPr/>
           </a:p>
         </p:txBody>
       </p:sp>
@@ -6482,7 +6422,7 @@
 </file>
 
 <file path=ppt/slides/slide5.xml><?xml version="1.0" encoding="utf-8"?>
-<p:sld xmlns:a="http://schemas.openxmlformats.org/drawingml/2006/main" xmlns:r="http://schemas.openxmlformats.org/officeDocument/2006/relationships" xmlns:p="http://schemas.openxmlformats.org/presentationml/2006/main">
+<p:sld xmlns:a="http://schemas.openxmlformats.org/drawingml/2006/main" xmlns:p="http://schemas.openxmlformats.org/presentationml/2006/main" xmlns:r="http://schemas.openxmlformats.org/officeDocument/2006/relationships">
   <p:cSld>
     <p:spTree>
       <p:nvGrpSpPr>
@@ -6490,14 +6430,7 @@
         <p:cNvGrpSpPr/>
         <p:nvPr/>
       </p:nvGrpSpPr>
-      <p:grpSpPr>
-        <a:xfrm>
-          <a:off x="0" y="0"/>
-          <a:ext cx="0" cy="0"/>
-          <a:chOff x="0" y="0"/>
-          <a:chExt cx="0" cy="0"/>
-        </a:xfrm>
-      </p:grpSpPr>
+      <p:grpSpPr/>
       <p:sp>
         <p:nvSpPr>
           <p:cNvPr id="2" name="TextBox 1"/>
@@ -6610,7 +6543,6 @@
           <a:lstStyle/>
           <a:p>
             <a:pPr algn="ctr"/>
-            <a:endParaRPr/>
           </a:p>
         </p:txBody>
       </p:sp>
@@ -6737,7 +6669,6 @@
           <a:lstStyle/>
           <a:p>
             <a:pPr algn="ctr"/>
-            <a:endParaRPr/>
           </a:p>
         </p:txBody>
       </p:sp>
@@ -6820,7 +6751,7 @@
 </file>
 
 <file path=ppt/slides/slide6.xml><?xml version="1.0" encoding="utf-8"?>
-<p:sld xmlns:a="http://schemas.openxmlformats.org/drawingml/2006/main" xmlns:r="http://schemas.openxmlformats.org/officeDocument/2006/relationships" xmlns:p="http://schemas.openxmlformats.org/presentationml/2006/main">
+<p:sld xmlns:a="http://schemas.openxmlformats.org/drawingml/2006/main" xmlns:p="http://schemas.openxmlformats.org/presentationml/2006/main" xmlns:r="http://schemas.openxmlformats.org/officeDocument/2006/relationships">
   <p:cSld>
     <p:spTree>
       <p:nvGrpSpPr>
@@ -6828,14 +6759,7 @@
         <p:cNvGrpSpPr/>
         <p:nvPr/>
       </p:nvGrpSpPr>
-      <p:grpSpPr>
-        <a:xfrm>
-          <a:off x="0" y="0"/>
-          <a:ext cx="0" cy="0"/>
-          <a:chOff x="0" y="0"/>
-          <a:chExt cx="0" cy="0"/>
-        </a:xfrm>
-      </p:grpSpPr>
+      <p:grpSpPr/>
       <p:sp>
         <p:nvSpPr>
           <p:cNvPr id="2" name="TextBox 1"/>
@@ -6948,7 +6872,6 @@
           <a:lstStyle/>
           <a:p>
             <a:pPr algn="ctr"/>
-            <a:endParaRPr/>
           </a:p>
         </p:txBody>
       </p:sp>
@@ -7075,7 +6998,6 @@
           <a:lstStyle/>
           <a:p>
             <a:pPr algn="ctr"/>
-            <a:endParaRPr/>
           </a:p>
         </p:txBody>
       </p:sp>
@@ -7158,7 +7080,7 @@
 </file>
 
 <file path=ppt/slides/slide7.xml><?xml version="1.0" encoding="utf-8"?>
-<p:sld xmlns:a="http://schemas.openxmlformats.org/drawingml/2006/main" xmlns:r="http://schemas.openxmlformats.org/officeDocument/2006/relationships" xmlns:p="http://schemas.openxmlformats.org/presentationml/2006/main">
+<p:sld xmlns:a="http://schemas.openxmlformats.org/drawingml/2006/main" xmlns:p="http://schemas.openxmlformats.org/presentationml/2006/main" xmlns:r="http://schemas.openxmlformats.org/officeDocument/2006/relationships">
   <p:cSld>
     <p:spTree>
       <p:nvGrpSpPr>
@@ -7166,14 +7088,7 @@
         <p:cNvGrpSpPr/>
         <p:nvPr/>
       </p:nvGrpSpPr>
-      <p:grpSpPr>
-        <a:xfrm>
-          <a:off x="0" y="0"/>
-          <a:ext cx="0" cy="0"/>
-          <a:chOff x="0" y="0"/>
-          <a:chExt cx="0" cy="0"/>
-        </a:xfrm>
-      </p:grpSpPr>
+      <p:grpSpPr/>
       <p:sp>
         <p:nvSpPr>
           <p:cNvPr id="2" name="TextBox 1"/>
@@ -7286,7 +7201,6 @@
           <a:lstStyle/>
           <a:p>
             <a:pPr algn="ctr"/>
-            <a:endParaRPr/>
           </a:p>
         </p:txBody>
       </p:sp>
@@ -7328,11 +7242,11 @@
           </a:fontRef>
         </p:style>
         <p:txBody>
-          <a:bodyPr lIns="137160" tIns="137160" rtlCol="0" anchor="ctr"/>
+          <a:bodyPr rtlCol="0" anchor="ctr" lIns="137160" tIns="137160"/>
           <a:lstStyle/>
           <a:p>
             <a:pPr algn="ctr">
-              <a:defRPr sz="1300" b="1">
+              <a:defRPr b="1" sz="1300">
                 <a:solidFill>
                   <a:srgbClr val="051C2C"/>
                 </a:solidFill>
@@ -7418,11 +7332,11 @@
           </a:fontRef>
         </p:style>
         <p:txBody>
-          <a:bodyPr lIns="137160" tIns="137160" rtlCol="0" anchor="ctr"/>
+          <a:bodyPr rtlCol="0" anchor="ctr" lIns="137160" tIns="137160"/>
           <a:lstStyle/>
           <a:p>
             <a:pPr algn="ctr">
-              <a:defRPr sz="1300" b="1">
+              <a:defRPr b="1" sz="1300">
                 <a:solidFill>
                   <a:srgbClr val="051C2C"/>
                 </a:solidFill>
@@ -7510,7 +7424,6 @@
           <a:lstStyle/>
           <a:p>
             <a:pPr algn="ctr"/>
-            <a:endParaRPr/>
           </a:p>
         </p:txBody>
       </p:sp>
@@ -7593,7 +7506,7 @@
 </file>
 
 <file path=ppt/slides/slide8.xml><?xml version="1.0" encoding="utf-8"?>
-<p:sld xmlns:a="http://schemas.openxmlformats.org/drawingml/2006/main" xmlns:r="http://schemas.openxmlformats.org/officeDocument/2006/relationships" xmlns:p="http://schemas.openxmlformats.org/presentationml/2006/main">
+<p:sld xmlns:a="http://schemas.openxmlformats.org/drawingml/2006/main" xmlns:p="http://schemas.openxmlformats.org/presentationml/2006/main" xmlns:r="http://schemas.openxmlformats.org/officeDocument/2006/relationships">
   <p:cSld>
     <p:bg>
       <p:bgPr>
@@ -7609,14 +7522,7 @@
         <p:cNvGrpSpPr/>
         <p:nvPr/>
       </p:nvGrpSpPr>
-      <p:grpSpPr>
-        <a:xfrm>
-          <a:off x="0" y="0"/>
-          <a:ext cx="0" cy="0"/>
-          <a:chOff x="0" y="0"/>
-          <a:chExt cx="0" cy="0"/>
-        </a:xfrm>
-      </p:grpSpPr>
+      <p:grpSpPr/>
       <p:sp>
         <p:nvSpPr>
           <p:cNvPr id="2" name="TextBox 1"/>
@@ -7727,7 +7633,6 @@
           <a:lstStyle/>
           <a:p>
             <a:pPr algn="ctr"/>
-            <a:endParaRPr/>
           </a:p>
         </p:txBody>
       </p:sp>
@@ -7810,7 +7715,7 @@
 </file>
 
 <file path=ppt/slides/slide9.xml><?xml version="1.0" encoding="utf-8"?>
-<p:sld xmlns:a="http://schemas.openxmlformats.org/drawingml/2006/main" xmlns:r="http://schemas.openxmlformats.org/officeDocument/2006/relationships" xmlns:p="http://schemas.openxmlformats.org/presentationml/2006/main">
+<p:sld xmlns:a="http://schemas.openxmlformats.org/drawingml/2006/main" xmlns:p="http://schemas.openxmlformats.org/presentationml/2006/main" xmlns:r="http://schemas.openxmlformats.org/officeDocument/2006/relationships">
   <p:cSld>
     <p:spTree>
       <p:nvGrpSpPr>
@@ -7818,14 +7723,7 @@
         <p:cNvGrpSpPr/>
         <p:nvPr/>
       </p:nvGrpSpPr>
-      <p:grpSpPr>
-        <a:xfrm>
-          <a:off x="0" y="0"/>
-          <a:ext cx="0" cy="0"/>
-          <a:chOff x="0" y="0"/>
-          <a:chExt cx="0" cy="0"/>
-        </a:xfrm>
-      </p:grpSpPr>
+      <p:grpSpPr/>
       <p:sp>
         <p:nvSpPr>
           <p:cNvPr id="2" name="TextBox 1"/>
@@ -7938,7 +7836,6 @@
           <a:lstStyle/>
           <a:p>
             <a:pPr algn="ctr"/>
-            <a:endParaRPr/>
           </a:p>
         </p:txBody>
       </p:sp>
@@ -8170,7 +8067,6 @@
           <a:lstStyle/>
           <a:p>
             <a:pPr algn="ctr"/>
-            <a:endParaRPr/>
           </a:p>
         </p:txBody>
       </p:sp>
